--- a/validation/bakuzis_stress_v2/release_20261029/deck/2026-10-29_fvs-modern-catalog-deck_DRAFT.pptx
+++ b/validation/bakuzis_stress_v2/release_20261029/deck/2026-10-29_fvs-modern-catalog-deck_DRAFT.pptx
@@ -4461,7 +4461,7 @@
                 </a:solidFill>
                 <a:latin typeface="Calibri"/>
               </a:rPr>
-              <a:t>▪  No new engine runs; recomputed from the trajectory level data (stress_catalog.R, Cardinal job 15990793).</a:t>
+              <a:t>▪  No new engine runs; recomputed from the trajectory level data (stress_catalog.R, Cardinal jobs 15990793 and 16003647).</a:t>
             </a:r>
           </a:p>
           <a:p>
@@ -4560,7 +4560,7 @@
                 </a:solidFill>
                 <a:latin typeface="Calibri"/>
               </a:rPr>
-              <a:t>Source: fvs-modern main 1a520f5e, validation/bakuzis_stress_v2/ and config/catalog/ (October 29, 2026)</a:t>
+              <a:t>Source: fvs-modern main, validation/bakuzis_stress_v2/ (gates_v5, stress_v5) and config/catalog/ (October 29, 2026, regenerated catalog)</a:t>
             </a:r>
           </a:p>
         </p:txBody>
@@ -4904,7 +4904,7 @@
                           </a:solidFill>
                           <a:latin typeface="Calibri"/>
                         </a:rPr>
-                        <a:t>0.58</a:t>
+                        <a:t>0.56</a:t>
                       </a:r>
                     </a:p>
                   </a:txBody>
@@ -4975,7 +4975,7 @@
                           </a:solidFill>
                           <a:latin typeface="Calibri"/>
                         </a:rPr>
-                        <a:t>0.58</a:t>
+                        <a:t>0.56</a:t>
                       </a:r>
                     </a:p>
                   </a:txBody>
@@ -5046,7 +5046,7 @@
                           </a:solidFill>
                           <a:latin typeface="Calibri"/>
                         </a:rPr>
-                        <a:t>0.77</a:t>
+                        <a:t>0.89</a:t>
                       </a:r>
                     </a:p>
                   </a:txBody>
@@ -5117,7 +5117,7 @@
                           </a:solidFill>
                           <a:latin typeface="Calibri"/>
                         </a:rPr>
-                        <a:t>0.84</a:t>
+                        <a:t>0.72</a:t>
                       </a:r>
                     </a:p>
                   </a:txBody>
@@ -5188,7 +5188,7 @@
                           </a:solidFill>
                           <a:latin typeface="Calibri"/>
                         </a:rPr>
-                        <a:t>0.57</a:t>
+                        <a:t>0.67</a:t>
                       </a:r>
                     </a:p>
                   </a:txBody>
@@ -5259,7 +5259,7 @@
                           </a:solidFill>
                           <a:latin typeface="Calibri"/>
                         </a:rPr>
-                        <a:t>0.74</a:t>
+                        <a:t>0.80</a:t>
                       </a:r>
                     </a:p>
                   </a:txBody>
@@ -5330,7 +5330,7 @@
                           </a:solidFill>
                           <a:latin typeface="Calibri"/>
                         </a:rPr>
-                        <a:t>0.84</a:t>
+                        <a:t>0.80</a:t>
                       </a:r>
                     </a:p>
                   </a:txBody>
@@ -5401,7 +5401,7 @@
                           </a:solidFill>
                           <a:latin typeface="Calibri"/>
                         </a:rPr>
-                        <a:t>0.90</a:t>
+                        <a:t>0.88</a:t>
                       </a:r>
                     </a:p>
                   </a:txBody>
@@ -5473,7 +5473,7 @@
                 </a:solidFill>
                 <a:latin typeface="Calibri"/>
               </a:rPr>
-              <a:t>Recommended variants keep an admissible arm in 100 percent of resamples (ACD, BM, CS, LS, SN), 99 (NE), 90 (WS).</a:t>
+              <a:t>Recommended variants keep an admissible arm in 100 percent of resamples (ACD, BM, CS, NE, SN), 99 (LS), 89 (WS).</a:t>
             </a:r>
           </a:p>
           <a:p>
@@ -5489,7 +5489,7 @@
                 </a:solidFill>
                 <a:latin typeface="Calibri"/>
               </a:rPr>
-              <a:t>Fragile not admissible: CI default native 0.51, SO four arms 0.19 to 0.46, CR calibrated native 0.24, TT calibrated GOMPIT 0.25, EC default native 0.16; all among the 13 arms a 25 percent Reineke tolerance admits, seven of eight below even odds.</a:t>
+              <a:t>Fragile not admissible: CI default native 0.50, SO four arms 0.20 to 0.46, CR calibrated native 0.22, TT calibrated GOMPIT 0.23, EC default native 0.14; all among the 12 arms a 25 percent Reineke tolerance admits, all below even odds.</a:t>
             </a:r>
           </a:p>
           <a:p>
@@ -6201,7 +6201,7 @@
                 </a:solidFill>
                 <a:latin typeface="Calibri"/>
               </a:rPr>
-              <a:t>Source: fvs-modern main 1a520f5e, validation/bakuzis_stress_v2/ and config/catalog/ (October 29, 2026)</a:t>
+              <a:t>Source: fvs-modern main, validation/bakuzis_stress_v2/ (gates_v5, stress_v5) and config/catalog/ (October 29, 2026, regenerated catalog)</a:t>
             </a:r>
           </a:p>
         </p:txBody>
@@ -6488,7 +6488,7 @@
                 </a:solidFill>
                 <a:latin typeface="Calibri"/>
               </a:rPr>
-              <a:t>▪  263 stands (256 eastern) fail the year zero gate, nearly all entering at 1.3 to 1.8 times their FIA basal area with verified input; excluded, unexplained, open.</a:t>
+              <a:t>▪  The year zero failures of the first catalog are explained (null TPA_UNADJ records filled as 6.0 TPA trees) and gone; the regenerated catalog changed no verdict, and the Paper 1 ensemble rerun with the fix keeps every scorecard count.</a:t>
             </a:r>
           </a:p>
           <a:p>
@@ -6520,7 +6520,7 @@
                 </a:solidFill>
                 <a:latin typeface="Calibri"/>
               </a:rPr>
-              <a:t>▪  In NE the stable arm is default native (0.98); the shipped GOMPIT preference trades long horizon stability for near term evidence.</a:t>
+              <a:t>▪  In NE the stable arm is default native (0.96); the shipped GOMPIT preference trades long horizon stability for near term evidence.</a:t>
             </a:r>
           </a:p>
         </p:txBody>
@@ -6603,7 +6603,7 @@
                 </a:solidFill>
                 <a:latin typeface="Calibri"/>
               </a:rPr>
-              <a:t>Source: fvs-modern main 1a520f5e, validation/bakuzis_stress_v2/ and config/catalog/ (October 29, 2026); implementation-notes.md</a:t>
+              <a:t>Source: fvs-modern main, validation/bakuzis_stress_v2/ (gates_v5, stress_v5) and config/catalog/ (October 29, 2026, regenerated catalog); implementation-notes.md</a:t>
             </a:r>
           </a:p>
         </p:txBody>
@@ -6826,7 +6826,7 @@
                 </a:solidFill>
                 <a:latin typeface="Calibri"/>
               </a:rPr>
-              <a:t>▪  GitHub: advanced-forestry-systems/fvs-modern, main at 1a520f5e (PRs 118 to 126). config/catalog/ holds the two tables the selector reads; validation/bakuzis_stress_v2/ holds the memo (Sections 1 to 16), the catalog folder, scorecards, stress test and run index with md5 lists.</a:t>
+              <a:t>▪  GitHub: advanced-forestry-systems/fvs-modern, main (PRs 118 to 130; regenerated catalog in gates_v5). config/catalog/ holds the two tables the selector reads; validation/bakuzis_stress_v2/ holds the memo (Sections 1 to 16), the catalog folder, scorecards, stress test and run index with md5 lists.</a:t>
             </a:r>
           </a:p>
           <a:p>
@@ -6842,7 +6842,7 @@
                 </a:solidFill>
                 <a:latin typeface="Calibri"/>
               </a:rPr>
-              <a:t>▪  Zenodo: concept DOI 10.5281/zenodo.23777723 (version 1.0.0 at 10.5281/zenodo.23777724) carries the tables, scripts, scorecard cells, the technical report and this deck. No FIA plot identifiers or coordinates in any file.</a:t>
+              <a:t>▪  Zenodo: concept DOI 10.5281/zenodo.23777723 (version 1.0.0 is the first catalog, 1.1.0 the regenerated one) carries the tables, scripts, scorecard cells, the technical report and this deck. No FIA plot identifiers or coordinates in any file.</a:t>
             </a:r>
           </a:p>
           <a:p>
@@ -6874,7 +6874,7 @@
                 </a:solidFill>
                 <a:latin typeface="Calibri"/>
               </a:rPr>
-              <a:t>▪  Cardinal jobs: build 15967530, runs 15976824 and 15984133, finalize 15984134, scorecards 15986836, stress 15990793.</a:t>
+              <a:t>▪  Cardinal jobs: build 15967530, first runs 15976824 and 15984133, regenerated runs 15998817, finalize 16002593, stress 16003647, scorecards 16003648.</a:t>
             </a:r>
           </a:p>
         </p:txBody>
@@ -7040,7 +7040,7 @@
                 </a:solidFill>
                 <a:latin typeface="Calibri"/>
               </a:rPr>
-              <a:t>Source: fvs-modern main 1a520f5e, validation/bakuzis_stress_v2/ and config/catalog/ (October 29, 2026)</a:t>
+              <a:t>Source: fvs-modern main, validation/bakuzis_stress_v2/ (gates_v5, stress_v5) and config/catalog/ (October 29, 2026, regenerated catalog)</a:t>
             </a:r>
           </a:p>
         </p:txBody>
@@ -7541,7 +7541,7 @@
                 </a:solidFill>
                 <a:latin typeface="Calibri"/>
               </a:rPr>
-              <a:t>Source: fvs-modern main 1a520f5e, validation/bakuzis_stress_v2/ and config/catalog/ (October 29, 2026)</a:t>
+              <a:t>Source: fvs-modern main, validation/bakuzis_stress_v2/ (gates_v5, stress_v5) and config/catalog/ (October 29, 2026, regenerated catalog)</a:t>
             </a:r>
           </a:p>
         </p:txBody>
@@ -7780,7 +7780,7 @@
                 </a:solidFill>
                 <a:latin typeface="Calibri"/>
               </a:rPr>
-              <a:t>▪  Year zero gate: engine basal area within 20 percent of FIA BALIVE. Passes 95 to 100 percent of stands in 15 variants, 89 percent LS, 78 CS, 54 SN; 4,485 stands carry the gates.</a:t>
+              <a:t>▪  Year zero gate: engine basal area within 20 percent of FIA BALIVE (or 1 ft2 ac-1). The first catalog failed 263 eastern stands; the cause was phantom trees (FIA live records with null TPA_UNADJ filled at 6.0 TPA by the stand generator), fixed October 29, and all 4,748 sampled stands now pass.</a:t>
             </a:r>
           </a:p>
           <a:p>
@@ -7911,7 +7911,7 @@
                 </a:solidFill>
                 <a:latin typeface="Calibri"/>
               </a:rPr>
-              <a:t>Source: fvs-modern main 1a520f5e, validation/bakuzis_stress_v2/ and config/catalog/ (October 29, 2026)</a:t>
+              <a:t>Source: fvs-modern main, validation/bakuzis_stress_v2/ (gates_v5, stress_v5) and config/catalog/ (October 29, 2026, regenerated catalog)</a:t>
             </a:r>
           </a:p>
         </p:txBody>
@@ -8741,7 +8741,7 @@
                 </a:solidFill>
                 <a:latin typeface="Calibri"/>
               </a:rPr>
-              <a:t>Source: fvs-modern main 1a520f5e, validation/bakuzis_stress_v2/ and config/catalog/ (October 29, 2026)</a:t>
+              <a:t>Source: fvs-modern main, validation/bakuzis_stress_v2/ (gates_v5, stress_v5) and config/catalog/ (October 29, 2026, regenerated catalog)</a:t>
             </a:r>
           </a:p>
         </p:txBody>
@@ -9143,7 +9143,7 @@
                 </a:solidFill>
                 <a:latin typeface="Calibri"/>
               </a:rPr>
-              <a:t>Source: fvs-modern main 1a520f5e, validation/bakuzis_stress_v2/ and config/catalog/ (October 29, 2026)</a:t>
+              <a:t>Source: fvs-modern main, validation/bakuzis_stress_v2/ (gates_v5, stress_v5) and config/catalog/ (October 29, 2026, regenerated catalog)</a:t>
             </a:r>
           </a:p>
         </p:txBody>
@@ -9560,7 +9560,7 @@
                 </a:solidFill>
                 <a:latin typeface="Calibri"/>
               </a:rPr>
-              <a:t>Source: fvs-modern main 1a520f5e, validation/bakuzis_stress_v2/ and config/catalog/ (October 29, 2026)</a:t>
+              <a:t>Source: fvs-modern main, validation/bakuzis_stress_v2/ (gates_v5, stress_v5) and config/catalog/ (October 29, 2026, regenerated catalog)</a:t>
             </a:r>
           </a:p>
         </p:txBody>
@@ -9823,7 +9823,7 @@
                 </a:solidFill>
                 <a:latin typeface="Calibri"/>
               </a:rPr>
-              <a:t>▪  Exceptions on magnitude: EM native (22 and 10 percent) and EM default GOMPIT (8), LS default (14 and 10), WC native (11 and 9), PN native (34 and 32 on 38 stands).</a:t>
+              <a:t>▪  Exceptions on magnitude: EM native (22 and 10 percent) and EM default GOMPIT (8), LS default (15 and 10), WC native (11 and 9), PN native (34 and 32 on 38 stands).</a:t>
             </a:r>
           </a:p>
           <a:p>
@@ -9938,7 +9938,7 @@
                 </a:solidFill>
                 <a:latin typeface="Calibri"/>
               </a:rPr>
-              <a:t>Source: fvs-modern main 1a520f5e, validation/bakuzis_stress_v2/ and config/catalog/ (October 29, 2026); catalog_gates_by_arm.csv</a:t>
+              <a:t>Source: fvs-modern main, validation/bakuzis_stress_v2/ (gates_v5, stress_v5) and config/catalog/ (October 29, 2026, regenerated catalog); catalog_gates_by_arm.csv</a:t>
             </a:r>
           </a:p>
         </p:txBody>
